--- a/docs/DevOps_Incident_Suite_Presentation.pptx
+++ b/docs/DevOps_Incident_Suite_Presentation.pptx
@@ -5,22 +5,22 @@
     <p:sldMasterId id="2147483648" r:id="rId1"/>
   </p:sldMasterIdLst>
   <p:sldIdLst>
-    <p:sldId id="256" r:id="rId7"/>
-    <p:sldId id="257" r:id="rId8"/>
-    <p:sldId id="258" r:id="rId9"/>
-    <p:sldId id="259" r:id="rId10"/>
-    <p:sldId id="260" r:id="rId11"/>
-    <p:sldId id="261" r:id="rId12"/>
-    <p:sldId id="262" r:id="rId13"/>
-    <p:sldId id="263" r:id="rId14"/>
-    <p:sldId id="264" r:id="rId15"/>
-    <p:sldId id="265" r:id="rId16"/>
-    <p:sldId id="266" r:id="rId17"/>
-    <p:sldId id="267" r:id="rId18"/>
-    <p:sldId id="268" r:id="rId19"/>
-    <p:sldId id="269" r:id="rId20"/>
-    <p:sldId id="270" r:id="rId21"/>
-    <p:sldId id="271" r:id="rId22"/>
+    <p:sldId id="256" r:id="rId2"/>
+    <p:sldId id="257" r:id="rId3"/>
+    <p:sldId id="258" r:id="rId4"/>
+    <p:sldId id="259" r:id="rId5"/>
+    <p:sldId id="260" r:id="rId6"/>
+    <p:sldId id="261" r:id="rId7"/>
+    <p:sldId id="262" r:id="rId8"/>
+    <p:sldId id="263" r:id="rId9"/>
+    <p:sldId id="264" r:id="rId10"/>
+    <p:sldId id="265" r:id="rId11"/>
+    <p:sldId id="266" r:id="rId12"/>
+    <p:sldId id="267" r:id="rId13"/>
+    <p:sldId id="268" r:id="rId14"/>
+    <p:sldId id="269" r:id="rId15"/>
+    <p:sldId id="270" r:id="rId16"/>
+    <p:sldId id="271" r:id="rId17"/>
   </p:sldIdLst>
   <p:sldSz cx="9144000" cy="6858000" type="screen4x3"/>
   <p:notesSz cx="6858000" cy="9144000"/>
@@ -119,6 +119,22 @@
       </a:defRPr>
     </a:lvl9pPr>
   </p:defaultTextStyle>
+  <p:extLst>
+    <p:ext uri="{EFAFB233-063F-42B5-8137-9DF3F51BA10A}">
+      <p15:sldGuideLst xmlns:p15="http://schemas.microsoft.com/office/powerpoint/2012/main">
+        <p15:guide id="1" orient="horz" pos="2160">
+          <p15:clr>
+            <a:srgbClr val="A4A3A4"/>
+          </p15:clr>
+        </p15:guide>
+        <p15:guide id="2" pos="2880">
+          <p15:clr>
+            <a:srgbClr val="A4A3A4"/>
+          </p15:clr>
+        </p15:guide>
+      </p15:sldGuideLst>
+    </p:ext>
+  </p:extLst>
 </p:presentation>
 </file>
 
@@ -160,10 +176,9 @@
           <a:lstStyle/>
           <a:p>
             <a:r>
-              <a:rPr lang="en-US" smtClean="0"/>
+              <a:rPr lang="en-US"/>
               <a:t>Click to edit Master title style</a:t>
             </a:r>
-            <a:endParaRPr lang="en-US"/>
           </a:p>
         </p:txBody>
       </p:sp>
@@ -279,10 +294,9 @@
           </a:lstStyle>
           <a:p>
             <a:r>
-              <a:rPr lang="en-US" smtClean="0"/>
+              <a:rPr lang="en-US"/>
               <a:t>Click to edit Master subtitle style</a:t>
             </a:r>
-            <a:endParaRPr lang="en-US"/>
           </a:p>
         </p:txBody>
       </p:sp>
@@ -303,7 +317,7 @@
           <a:p>
             <a:fld id="{5BCAD085-E8A6-8845-BD4E-CB4CCA059FC4}" type="datetimeFigureOut">
               <a:rPr lang="en-US" smtClean="0"/>
-              <a:t>1/27/13</a:t>
+              <a:t>6/13/26</a:t>
             </a:fld>
             <a:endParaRPr lang="en-US"/>
           </a:p>
@@ -397,10 +411,9 @@
           <a:lstStyle/>
           <a:p>
             <a:r>
-              <a:rPr lang="en-US" smtClean="0"/>
+              <a:rPr lang="en-US"/>
               <a:t>Click to edit Master title style</a:t>
             </a:r>
-            <a:endParaRPr lang="en-US"/>
           </a:p>
         </p:txBody>
       </p:sp>
@@ -421,38 +434,37 @@
           <a:p>
             <a:pPr lvl="0"/>
             <a:r>
-              <a:rPr lang="en-US" smtClean="0"/>
+              <a:rPr lang="en-US"/>
               <a:t>Click to edit Master text styles</a:t>
             </a:r>
           </a:p>
           <a:p>
             <a:pPr lvl="1"/>
             <a:r>
-              <a:rPr lang="en-US" smtClean="0"/>
+              <a:rPr lang="en-US"/>
               <a:t>Second level</a:t>
             </a:r>
           </a:p>
           <a:p>
             <a:pPr lvl="2"/>
             <a:r>
-              <a:rPr lang="en-US" smtClean="0"/>
+              <a:rPr lang="en-US"/>
               <a:t>Third level</a:t>
             </a:r>
           </a:p>
           <a:p>
             <a:pPr lvl="3"/>
             <a:r>
-              <a:rPr lang="en-US" smtClean="0"/>
+              <a:rPr lang="en-US"/>
               <a:t>Fourth level</a:t>
             </a:r>
           </a:p>
           <a:p>
             <a:pPr lvl="4"/>
             <a:r>
-              <a:rPr lang="en-US" smtClean="0"/>
+              <a:rPr lang="en-US"/>
               <a:t>Fifth level</a:t>
             </a:r>
-            <a:endParaRPr lang="en-US"/>
           </a:p>
         </p:txBody>
       </p:sp>
@@ -473,7 +485,7 @@
           <a:p>
             <a:fld id="{5BCAD085-E8A6-8845-BD4E-CB4CCA059FC4}" type="datetimeFigureOut">
               <a:rPr lang="en-US" smtClean="0"/>
-              <a:t>1/27/13</a:t>
+              <a:t>6/13/26</a:t>
             </a:fld>
             <a:endParaRPr lang="en-US"/>
           </a:p>
@@ -572,10 +584,9 @@
           <a:lstStyle/>
           <a:p>
             <a:r>
-              <a:rPr lang="en-US" smtClean="0"/>
+              <a:rPr lang="en-US"/>
               <a:t>Click to edit Master title style</a:t>
             </a:r>
-            <a:endParaRPr lang="en-US"/>
           </a:p>
         </p:txBody>
       </p:sp>
@@ -601,38 +612,37 @@
           <a:p>
             <a:pPr lvl="0"/>
             <a:r>
-              <a:rPr lang="en-US" smtClean="0"/>
+              <a:rPr lang="en-US"/>
               <a:t>Click to edit Master text styles</a:t>
             </a:r>
           </a:p>
           <a:p>
             <a:pPr lvl="1"/>
             <a:r>
-              <a:rPr lang="en-US" smtClean="0"/>
+              <a:rPr lang="en-US"/>
               <a:t>Second level</a:t>
             </a:r>
           </a:p>
           <a:p>
             <a:pPr lvl="2"/>
             <a:r>
-              <a:rPr lang="en-US" smtClean="0"/>
+              <a:rPr lang="en-US"/>
               <a:t>Third level</a:t>
             </a:r>
           </a:p>
           <a:p>
             <a:pPr lvl="3"/>
             <a:r>
-              <a:rPr lang="en-US" smtClean="0"/>
+              <a:rPr lang="en-US"/>
               <a:t>Fourth level</a:t>
             </a:r>
           </a:p>
           <a:p>
             <a:pPr lvl="4"/>
             <a:r>
-              <a:rPr lang="en-US" smtClean="0"/>
+              <a:rPr lang="en-US"/>
               <a:t>Fifth level</a:t>
             </a:r>
-            <a:endParaRPr lang="en-US"/>
           </a:p>
         </p:txBody>
       </p:sp>
@@ -653,7 +663,7 @@
           <a:p>
             <a:fld id="{5BCAD085-E8A6-8845-BD4E-CB4CCA059FC4}" type="datetimeFigureOut">
               <a:rPr lang="en-US" smtClean="0"/>
-              <a:t>1/27/13</a:t>
+              <a:t>6/13/26</a:t>
             </a:fld>
             <a:endParaRPr lang="en-US"/>
           </a:p>
@@ -747,10 +757,9 @@
           <a:lstStyle/>
           <a:p>
             <a:r>
-              <a:rPr lang="en-US" smtClean="0"/>
+              <a:rPr lang="en-US"/>
               <a:t>Click to edit Master title style</a:t>
             </a:r>
-            <a:endParaRPr lang="en-US"/>
           </a:p>
         </p:txBody>
       </p:sp>
@@ -771,38 +780,37 @@
           <a:p>
             <a:pPr lvl="0"/>
             <a:r>
-              <a:rPr lang="en-US" smtClean="0"/>
+              <a:rPr lang="en-US"/>
               <a:t>Click to edit Master text styles</a:t>
             </a:r>
           </a:p>
           <a:p>
             <a:pPr lvl="1"/>
             <a:r>
-              <a:rPr lang="en-US" smtClean="0"/>
+              <a:rPr lang="en-US"/>
               <a:t>Second level</a:t>
             </a:r>
           </a:p>
           <a:p>
             <a:pPr lvl="2"/>
             <a:r>
-              <a:rPr lang="en-US" smtClean="0"/>
+              <a:rPr lang="en-US"/>
               <a:t>Third level</a:t>
             </a:r>
           </a:p>
           <a:p>
             <a:pPr lvl="3"/>
             <a:r>
-              <a:rPr lang="en-US" smtClean="0"/>
+              <a:rPr lang="en-US"/>
               <a:t>Fourth level</a:t>
             </a:r>
           </a:p>
           <a:p>
             <a:pPr lvl="4"/>
             <a:r>
-              <a:rPr lang="en-US" smtClean="0"/>
+              <a:rPr lang="en-US"/>
               <a:t>Fifth level</a:t>
             </a:r>
-            <a:endParaRPr lang="en-US"/>
           </a:p>
         </p:txBody>
       </p:sp>
@@ -823,7 +831,7 @@
           <a:p>
             <a:fld id="{5BCAD085-E8A6-8845-BD4E-CB4CCA059FC4}" type="datetimeFigureOut">
               <a:rPr lang="en-US" smtClean="0"/>
-              <a:t>1/27/13</a:t>
+              <a:t>6/13/26</a:t>
             </a:fld>
             <a:endParaRPr lang="en-US"/>
           </a:p>
@@ -926,10 +934,9 @@
           </a:lstStyle>
           <a:p>
             <a:r>
-              <a:rPr lang="en-US" smtClean="0"/>
+              <a:rPr lang="en-US"/>
               <a:t>Click to edit Master title style</a:t>
             </a:r>
-            <a:endParaRPr lang="en-US"/>
           </a:p>
         </p:txBody>
       </p:sp>
@@ -1046,7 +1053,7 @@
           <a:p>
             <a:pPr lvl="0"/>
             <a:r>
-              <a:rPr lang="en-US" smtClean="0"/>
+              <a:rPr lang="en-US"/>
               <a:t>Click to edit Master text styles</a:t>
             </a:r>
           </a:p>
@@ -1069,7 +1076,7 @@
           <a:p>
             <a:fld id="{5BCAD085-E8A6-8845-BD4E-CB4CCA059FC4}" type="datetimeFigureOut">
               <a:rPr lang="en-US" smtClean="0"/>
-              <a:t>1/27/13</a:t>
+              <a:t>6/13/26</a:t>
             </a:fld>
             <a:endParaRPr lang="en-US"/>
           </a:p>
@@ -1163,10 +1170,9 @@
           <a:lstStyle/>
           <a:p>
             <a:r>
-              <a:rPr lang="en-US" smtClean="0"/>
+              <a:rPr lang="en-US"/>
               <a:t>Click to edit Master title style</a:t>
             </a:r>
-            <a:endParaRPr lang="en-US"/>
           </a:p>
         </p:txBody>
       </p:sp>
@@ -1220,38 +1226,37 @@
           <a:p>
             <a:pPr lvl="0"/>
             <a:r>
-              <a:rPr lang="en-US" smtClean="0"/>
+              <a:rPr lang="en-US"/>
               <a:t>Click to edit Master text styles</a:t>
             </a:r>
           </a:p>
           <a:p>
             <a:pPr lvl="1"/>
             <a:r>
-              <a:rPr lang="en-US" smtClean="0"/>
+              <a:rPr lang="en-US"/>
               <a:t>Second level</a:t>
             </a:r>
           </a:p>
           <a:p>
             <a:pPr lvl="2"/>
             <a:r>
-              <a:rPr lang="en-US" smtClean="0"/>
+              <a:rPr lang="en-US"/>
               <a:t>Third level</a:t>
             </a:r>
           </a:p>
           <a:p>
             <a:pPr lvl="3"/>
             <a:r>
-              <a:rPr lang="en-US" smtClean="0"/>
+              <a:rPr lang="en-US"/>
               <a:t>Fourth level</a:t>
             </a:r>
           </a:p>
           <a:p>
             <a:pPr lvl="4"/>
             <a:r>
-              <a:rPr lang="en-US" smtClean="0"/>
+              <a:rPr lang="en-US"/>
               <a:t>Fifth level</a:t>
             </a:r>
-            <a:endParaRPr lang="en-US"/>
           </a:p>
         </p:txBody>
       </p:sp>
@@ -1305,38 +1310,37 @@
           <a:p>
             <a:pPr lvl="0"/>
             <a:r>
-              <a:rPr lang="en-US" smtClean="0"/>
+              <a:rPr lang="en-US"/>
               <a:t>Click to edit Master text styles</a:t>
             </a:r>
           </a:p>
           <a:p>
             <a:pPr lvl="1"/>
             <a:r>
-              <a:rPr lang="en-US" smtClean="0"/>
+              <a:rPr lang="en-US"/>
               <a:t>Second level</a:t>
             </a:r>
           </a:p>
           <a:p>
             <a:pPr lvl="2"/>
             <a:r>
-              <a:rPr lang="en-US" smtClean="0"/>
+              <a:rPr lang="en-US"/>
               <a:t>Third level</a:t>
             </a:r>
           </a:p>
           <a:p>
             <a:pPr lvl="3"/>
             <a:r>
-              <a:rPr lang="en-US" smtClean="0"/>
+              <a:rPr lang="en-US"/>
               <a:t>Fourth level</a:t>
             </a:r>
           </a:p>
           <a:p>
             <a:pPr lvl="4"/>
             <a:r>
-              <a:rPr lang="en-US" smtClean="0"/>
+              <a:rPr lang="en-US"/>
               <a:t>Fifth level</a:t>
             </a:r>
-            <a:endParaRPr lang="en-US"/>
           </a:p>
         </p:txBody>
       </p:sp>
@@ -1357,7 +1361,7 @@
           <a:p>
             <a:fld id="{5BCAD085-E8A6-8845-BD4E-CB4CCA059FC4}" type="datetimeFigureOut">
               <a:rPr lang="en-US" smtClean="0"/>
-              <a:t>1/27/13</a:t>
+              <a:t>6/13/26</a:t>
             </a:fld>
             <a:endParaRPr lang="en-US"/>
           </a:p>
@@ -1455,10 +1459,9 @@
           </a:lstStyle>
           <a:p>
             <a:r>
-              <a:rPr lang="en-US" smtClean="0"/>
+              <a:rPr lang="en-US"/>
               <a:t>Click to edit Master title style</a:t>
             </a:r>
-            <a:endParaRPr lang="en-US"/>
           </a:p>
         </p:txBody>
       </p:sp>
@@ -1521,7 +1524,7 @@
           <a:p>
             <a:pPr lvl="0"/>
             <a:r>
-              <a:rPr lang="en-US" smtClean="0"/>
+              <a:rPr lang="en-US"/>
               <a:t>Click to edit Master text styles</a:t>
             </a:r>
           </a:p>
@@ -1577,38 +1580,37 @@
           <a:p>
             <a:pPr lvl="0"/>
             <a:r>
-              <a:rPr lang="en-US" smtClean="0"/>
+              <a:rPr lang="en-US"/>
               <a:t>Click to edit Master text styles</a:t>
             </a:r>
           </a:p>
           <a:p>
             <a:pPr lvl="1"/>
             <a:r>
-              <a:rPr lang="en-US" smtClean="0"/>
+              <a:rPr lang="en-US"/>
               <a:t>Second level</a:t>
             </a:r>
           </a:p>
           <a:p>
             <a:pPr lvl="2"/>
             <a:r>
-              <a:rPr lang="en-US" smtClean="0"/>
+              <a:rPr lang="en-US"/>
               <a:t>Third level</a:t>
             </a:r>
           </a:p>
           <a:p>
             <a:pPr lvl="3"/>
             <a:r>
-              <a:rPr lang="en-US" smtClean="0"/>
+              <a:rPr lang="en-US"/>
               <a:t>Fourth level</a:t>
             </a:r>
           </a:p>
           <a:p>
             <a:pPr lvl="4"/>
             <a:r>
-              <a:rPr lang="en-US" smtClean="0"/>
+              <a:rPr lang="en-US"/>
               <a:t>Fifth level</a:t>
             </a:r>
-            <a:endParaRPr lang="en-US"/>
           </a:p>
         </p:txBody>
       </p:sp>
@@ -1671,7 +1673,7 @@
           <a:p>
             <a:pPr lvl="0"/>
             <a:r>
-              <a:rPr lang="en-US" smtClean="0"/>
+              <a:rPr lang="en-US"/>
               <a:t>Click to edit Master text styles</a:t>
             </a:r>
           </a:p>
@@ -1727,38 +1729,37 @@
           <a:p>
             <a:pPr lvl="0"/>
             <a:r>
-              <a:rPr lang="en-US" smtClean="0"/>
+              <a:rPr lang="en-US"/>
               <a:t>Click to edit Master text styles</a:t>
             </a:r>
           </a:p>
           <a:p>
             <a:pPr lvl="1"/>
             <a:r>
-              <a:rPr lang="en-US" smtClean="0"/>
+              <a:rPr lang="en-US"/>
               <a:t>Second level</a:t>
             </a:r>
           </a:p>
           <a:p>
             <a:pPr lvl="2"/>
             <a:r>
-              <a:rPr lang="en-US" smtClean="0"/>
+              <a:rPr lang="en-US"/>
               <a:t>Third level</a:t>
             </a:r>
           </a:p>
           <a:p>
             <a:pPr lvl="3"/>
             <a:r>
-              <a:rPr lang="en-US" smtClean="0"/>
+              <a:rPr lang="en-US"/>
               <a:t>Fourth level</a:t>
             </a:r>
           </a:p>
           <a:p>
             <a:pPr lvl="4"/>
             <a:r>
-              <a:rPr lang="en-US" smtClean="0"/>
+              <a:rPr lang="en-US"/>
               <a:t>Fifth level</a:t>
             </a:r>
-            <a:endParaRPr lang="en-US"/>
           </a:p>
         </p:txBody>
       </p:sp>
@@ -1779,7 +1780,7 @@
           <a:p>
             <a:fld id="{5BCAD085-E8A6-8845-BD4E-CB4CCA059FC4}" type="datetimeFigureOut">
               <a:rPr lang="en-US" smtClean="0"/>
-              <a:t>1/27/13</a:t>
+              <a:t>6/13/26</a:t>
             </a:fld>
             <a:endParaRPr lang="en-US"/>
           </a:p>
@@ -1873,10 +1874,9 @@
           <a:lstStyle/>
           <a:p>
             <a:r>
-              <a:rPr lang="en-US" smtClean="0"/>
+              <a:rPr lang="en-US"/>
               <a:t>Click to edit Master title style</a:t>
             </a:r>
-            <a:endParaRPr lang="en-US"/>
           </a:p>
         </p:txBody>
       </p:sp>
@@ -1897,7 +1897,7 @@
           <a:p>
             <a:fld id="{5BCAD085-E8A6-8845-BD4E-CB4CCA059FC4}" type="datetimeFigureOut">
               <a:rPr lang="en-US" smtClean="0"/>
-              <a:t>1/27/13</a:t>
+              <a:t>6/13/26</a:t>
             </a:fld>
             <a:endParaRPr lang="en-US"/>
           </a:p>
@@ -1992,7 +1992,7 @@
           <a:p>
             <a:fld id="{5BCAD085-E8A6-8845-BD4E-CB4CCA059FC4}" type="datetimeFigureOut">
               <a:rPr lang="en-US" smtClean="0"/>
-              <a:t>1/27/13</a:t>
+              <a:t>6/13/26</a:t>
             </a:fld>
             <a:endParaRPr lang="en-US"/>
           </a:p>
@@ -2095,10 +2095,9 @@
           </a:lstStyle>
           <a:p>
             <a:r>
-              <a:rPr lang="en-US" smtClean="0"/>
+              <a:rPr lang="en-US"/>
               <a:t>Click to edit Master title style</a:t>
             </a:r>
-            <a:endParaRPr lang="en-US"/>
           </a:p>
         </p:txBody>
       </p:sp>
@@ -2152,38 +2151,37 @@
           <a:p>
             <a:pPr lvl="0"/>
             <a:r>
-              <a:rPr lang="en-US" smtClean="0"/>
+              <a:rPr lang="en-US"/>
               <a:t>Click to edit Master text styles</a:t>
             </a:r>
           </a:p>
           <a:p>
             <a:pPr lvl="1"/>
             <a:r>
-              <a:rPr lang="en-US" smtClean="0"/>
+              <a:rPr lang="en-US"/>
               <a:t>Second level</a:t>
             </a:r>
           </a:p>
           <a:p>
             <a:pPr lvl="2"/>
             <a:r>
-              <a:rPr lang="en-US" smtClean="0"/>
+              <a:rPr lang="en-US"/>
               <a:t>Third level</a:t>
             </a:r>
           </a:p>
           <a:p>
             <a:pPr lvl="3"/>
             <a:r>
-              <a:rPr lang="en-US" smtClean="0"/>
+              <a:rPr lang="en-US"/>
               <a:t>Fourth level</a:t>
             </a:r>
           </a:p>
           <a:p>
             <a:pPr lvl="4"/>
             <a:r>
-              <a:rPr lang="en-US" smtClean="0"/>
+              <a:rPr lang="en-US"/>
               <a:t>Fifth level</a:t>
             </a:r>
-            <a:endParaRPr lang="en-US"/>
           </a:p>
         </p:txBody>
       </p:sp>
@@ -2246,7 +2244,7 @@
           <a:p>
             <a:pPr lvl="0"/>
             <a:r>
-              <a:rPr lang="en-US" smtClean="0"/>
+              <a:rPr lang="en-US"/>
               <a:t>Click to edit Master text styles</a:t>
             </a:r>
           </a:p>
@@ -2269,7 +2267,7 @@
           <a:p>
             <a:fld id="{5BCAD085-E8A6-8845-BD4E-CB4CCA059FC4}" type="datetimeFigureOut">
               <a:rPr lang="en-US" smtClean="0"/>
-              <a:t>1/27/13</a:t>
+              <a:t>6/13/26</a:t>
             </a:fld>
             <a:endParaRPr lang="en-US"/>
           </a:p>
@@ -2372,10 +2370,9 @@
           </a:lstStyle>
           <a:p>
             <a:r>
-              <a:rPr lang="en-US" smtClean="0"/>
+              <a:rPr lang="en-US"/>
               <a:t>Click to edit Master title style</a:t>
             </a:r>
-            <a:endParaRPr lang="en-US"/>
           </a:p>
         </p:txBody>
       </p:sp>
@@ -2499,7 +2496,7 @@
           <a:p>
             <a:pPr lvl="0"/>
             <a:r>
-              <a:rPr lang="en-US" smtClean="0"/>
+              <a:rPr lang="en-US"/>
               <a:t>Click to edit Master text styles</a:t>
             </a:r>
           </a:p>
@@ -2522,7 +2519,7 @@
           <a:p>
             <a:fld id="{5BCAD085-E8A6-8845-BD4E-CB4CCA059FC4}" type="datetimeFigureOut">
               <a:rPr lang="en-US" smtClean="0"/>
-              <a:t>1/27/13</a:t>
+              <a:t>6/13/26</a:t>
             </a:fld>
             <a:endParaRPr lang="en-US"/>
           </a:p>
@@ -2631,10 +2628,9 @@
           <a:lstStyle/>
           <a:p>
             <a:r>
-              <a:rPr lang="en-US" smtClean="0"/>
+              <a:rPr lang="en-US"/>
               <a:t>Click to edit Master title style</a:t>
             </a:r>
-            <a:endParaRPr lang="en-US"/>
           </a:p>
         </p:txBody>
       </p:sp>
@@ -2665,38 +2661,37 @@
           <a:p>
             <a:pPr lvl="0"/>
             <a:r>
-              <a:rPr lang="en-US" smtClean="0"/>
+              <a:rPr lang="en-US"/>
               <a:t>Click to edit Master text styles</a:t>
             </a:r>
           </a:p>
           <a:p>
             <a:pPr lvl="1"/>
             <a:r>
-              <a:rPr lang="en-US" smtClean="0"/>
+              <a:rPr lang="en-US"/>
               <a:t>Second level</a:t>
             </a:r>
           </a:p>
           <a:p>
             <a:pPr lvl="2"/>
             <a:r>
-              <a:rPr lang="en-US" smtClean="0"/>
+              <a:rPr lang="en-US"/>
               <a:t>Third level</a:t>
             </a:r>
           </a:p>
           <a:p>
             <a:pPr lvl="3"/>
             <a:r>
-              <a:rPr lang="en-US" smtClean="0"/>
+              <a:rPr lang="en-US"/>
               <a:t>Fourth level</a:t>
             </a:r>
           </a:p>
           <a:p>
             <a:pPr lvl="4"/>
             <a:r>
-              <a:rPr lang="en-US" smtClean="0"/>
+              <a:rPr lang="en-US"/>
               <a:t>Fifth level</a:t>
             </a:r>
-            <a:endParaRPr lang="en-US"/>
           </a:p>
         </p:txBody>
       </p:sp>
@@ -2735,7 +2730,7 @@
           <a:p>
             <a:fld id="{5BCAD085-E8A6-8845-BD4E-CB4CCA059FC4}" type="datetimeFigureOut">
               <a:rPr lang="en-US" smtClean="0"/>
-              <a:t>1/27/13</a:t>
+              <a:t>6/13/26</a:t>
             </a:fld>
             <a:endParaRPr lang="en-US"/>
           </a:p>
@@ -3094,7 +3089,7 @@
 </file>
 
 <file path=ppt/slides/slide1.xml><?xml version="1.0" encoding="utf-8"?>
-<p:sld xmlns:a="http://schemas.openxmlformats.org/drawingml/2006/main" xmlns:p="http://schemas.openxmlformats.org/presentationml/2006/main" xmlns:r="http://schemas.openxmlformats.org/officeDocument/2006/relationships">
+<p:sld xmlns:a="http://schemas.openxmlformats.org/drawingml/2006/main" xmlns:r="http://schemas.openxmlformats.org/officeDocument/2006/relationships" xmlns:p="http://schemas.openxmlformats.org/presentationml/2006/main">
   <p:cSld>
     <p:bg>
       <p:bgPr>
@@ -3110,7 +3105,14 @@
         <p:cNvGrpSpPr/>
         <p:nvPr/>
       </p:nvGrpSpPr>
-      <p:grpSpPr/>
+      <p:grpSpPr>
+        <a:xfrm>
+          <a:off x="0" y="0"/>
+          <a:ext cx="0" cy="0"/>
+          <a:chOff x="0" y="0"/>
+          <a:chExt cx="0" cy="0"/>
+        </a:xfrm>
+      </p:grpSpPr>
       <p:sp>
         <p:nvSpPr>
           <p:cNvPr id="2" name="TextBox 1"/>
@@ -3263,6 +3265,7 @@
           <a:lstStyle/>
           <a:p>
             <a:pPr algn="ctr"/>
+            <a:endParaRPr/>
           </a:p>
         </p:txBody>
       </p:sp>
@@ -3383,7 +3386,7 @@
 </file>
 
 <file path=ppt/slides/slide10.xml><?xml version="1.0" encoding="utf-8"?>
-<p:sld xmlns:a="http://schemas.openxmlformats.org/drawingml/2006/main" xmlns:p="http://schemas.openxmlformats.org/presentationml/2006/main" xmlns:r="http://schemas.openxmlformats.org/officeDocument/2006/relationships">
+<p:sld xmlns:a="http://schemas.openxmlformats.org/drawingml/2006/main" xmlns:r="http://schemas.openxmlformats.org/officeDocument/2006/relationships" xmlns:p="http://schemas.openxmlformats.org/presentationml/2006/main">
   <p:cSld>
     <p:spTree>
       <p:nvGrpSpPr>
@@ -3391,7 +3394,14 @@
         <p:cNvGrpSpPr/>
         <p:nvPr/>
       </p:nvGrpSpPr>
-      <p:grpSpPr/>
+      <p:grpSpPr>
+        <a:xfrm>
+          <a:off x="0" y="0"/>
+          <a:ext cx="0" cy="0"/>
+          <a:chOff x="0" y="0"/>
+          <a:chExt cx="0" cy="0"/>
+        </a:xfrm>
+      </p:grpSpPr>
       <p:sp>
         <p:nvSpPr>
           <p:cNvPr id="2" name="TextBox 1"/>
@@ -3468,6 +3478,7 @@
           <a:lstStyle/>
           <a:p>
             <a:pPr algn="ctr"/>
+            <a:endParaRPr/>
           </a:p>
         </p:txBody>
       </p:sp>
@@ -3822,7 +3833,7 @@
 </file>
 
 <file path=ppt/slides/slide11.xml><?xml version="1.0" encoding="utf-8"?>
-<p:sld xmlns:a="http://schemas.openxmlformats.org/drawingml/2006/main" xmlns:p="http://schemas.openxmlformats.org/presentationml/2006/main" xmlns:r="http://schemas.openxmlformats.org/officeDocument/2006/relationships">
+<p:sld xmlns:a="http://schemas.openxmlformats.org/drawingml/2006/main" xmlns:r="http://schemas.openxmlformats.org/officeDocument/2006/relationships" xmlns:p="http://schemas.openxmlformats.org/presentationml/2006/main">
   <p:cSld>
     <p:spTree>
       <p:nvGrpSpPr>
@@ -3830,7 +3841,14 @@
         <p:cNvGrpSpPr/>
         <p:nvPr/>
       </p:nvGrpSpPr>
-      <p:grpSpPr/>
+      <p:grpSpPr>
+        <a:xfrm>
+          <a:off x="0" y="0"/>
+          <a:ext cx="0" cy="0"/>
+          <a:chOff x="0" y="0"/>
+          <a:chExt cx="0" cy="0"/>
+        </a:xfrm>
+      </p:grpSpPr>
       <p:sp>
         <p:nvSpPr>
           <p:cNvPr id="2" name="TextBox 1"/>
@@ -3907,6 +3925,7 @@
           <a:lstStyle/>
           <a:p>
             <a:pPr algn="ctr"/>
+            <a:endParaRPr/>
           </a:p>
         </p:txBody>
       </p:sp>
@@ -3983,7 +4002,7 @@
           </a:fontRef>
         </p:style>
         <p:txBody>
-          <a:bodyPr rtlCol="0" anchor="ctr" wrap="square"/>
+          <a:bodyPr wrap="square" rtlCol="0" anchor="ctr"/>
           <a:lstStyle/>
           <a:p>
             <a:pPr algn="ctr"/>
@@ -4048,7 +4067,7 @@
           </a:fontRef>
         </p:style>
         <p:txBody>
-          <a:bodyPr rtlCol="0" anchor="ctr" wrap="square"/>
+          <a:bodyPr wrap="square" rtlCol="0" anchor="ctr"/>
           <a:lstStyle/>
           <a:p>
             <a:pPr algn="ctr"/>
@@ -4113,7 +4132,7 @@
           </a:fontRef>
         </p:style>
         <p:txBody>
-          <a:bodyPr rtlCol="0" anchor="ctr" wrap="square"/>
+          <a:bodyPr wrap="square" rtlCol="0" anchor="ctr"/>
           <a:lstStyle/>
           <a:p>
             <a:pPr algn="ctr"/>
@@ -4178,7 +4197,7 @@
           </a:fontRef>
         </p:style>
         <p:txBody>
-          <a:bodyPr rtlCol="0" anchor="ctr" wrap="square"/>
+          <a:bodyPr wrap="square" rtlCol="0" anchor="ctr"/>
           <a:lstStyle/>
           <a:p>
             <a:pPr algn="ctr"/>
@@ -6074,15 +6093,7 @@
           <a:lstStyle/>
           <a:p>
             <a:pPr algn="ctr"/>
-            <a:r>
-              <a:rPr sz="1100" b="1">
-                <a:solidFill>
-                  <a:srgbClr val="2D3436"/>
-                </a:solidFill>
-                <a:latin typeface="Calibri"/>
-              </a:rPr>
-              <a:t/>
-            </a:r>
+            <a:endParaRPr/>
           </a:p>
         </p:txBody>
       </p:sp>
@@ -6131,7 +6142,7 @@
 </file>
 
 <file path=ppt/slides/slide12.xml><?xml version="1.0" encoding="utf-8"?>
-<p:sld xmlns:a="http://schemas.openxmlformats.org/drawingml/2006/main" xmlns:p="http://schemas.openxmlformats.org/presentationml/2006/main" xmlns:r="http://schemas.openxmlformats.org/officeDocument/2006/relationships">
+<p:sld xmlns:a="http://schemas.openxmlformats.org/drawingml/2006/main" xmlns:r="http://schemas.openxmlformats.org/officeDocument/2006/relationships" xmlns:p="http://schemas.openxmlformats.org/presentationml/2006/main">
   <p:cSld>
     <p:spTree>
       <p:nvGrpSpPr>
@@ -6139,7 +6150,14 @@
         <p:cNvGrpSpPr/>
         <p:nvPr/>
       </p:nvGrpSpPr>
-      <p:grpSpPr/>
+      <p:grpSpPr>
+        <a:xfrm>
+          <a:off x="0" y="0"/>
+          <a:ext cx="0" cy="0"/>
+          <a:chOff x="0" y="0"/>
+          <a:chExt cx="0" cy="0"/>
+        </a:xfrm>
+      </p:grpSpPr>
       <p:sp>
         <p:nvSpPr>
           <p:cNvPr id="2" name="TextBox 1"/>
@@ -6216,6 +6234,7 @@
           <a:lstStyle/>
           <a:p>
             <a:pPr algn="ctr"/>
+            <a:endParaRPr/>
           </a:p>
         </p:txBody>
       </p:sp>
@@ -6292,7 +6311,7 @@
           </a:fontRef>
         </p:style>
         <p:txBody>
-          <a:bodyPr rtlCol="0" anchor="ctr" wrap="square"/>
+          <a:bodyPr wrap="square" rtlCol="0" anchor="ctr"/>
           <a:lstStyle/>
           <a:p>
             <a:pPr algn="ctr"/>
@@ -6385,7 +6404,7 @@
           </a:fontRef>
         </p:style>
         <p:txBody>
-          <a:bodyPr rtlCol="0" anchor="ctr" wrap="square"/>
+          <a:bodyPr wrap="square" rtlCol="0" anchor="ctr"/>
           <a:lstStyle/>
           <a:p>
             <a:pPr algn="ctr"/>
@@ -6486,7 +6505,7 @@
           </a:fontRef>
         </p:style>
         <p:txBody>
-          <a:bodyPr rtlCol="0" anchor="ctr" wrap="square"/>
+          <a:bodyPr wrap="square" rtlCol="0" anchor="ctr"/>
           <a:lstStyle/>
           <a:p>
             <a:pPr algn="ctr"/>
@@ -6587,7 +6606,7 @@
           </a:fontRef>
         </p:style>
         <p:txBody>
-          <a:bodyPr rtlCol="0" anchor="ctr" wrap="square"/>
+          <a:bodyPr wrap="square" rtlCol="0" anchor="ctr"/>
           <a:lstStyle/>
           <a:p>
             <a:pPr algn="ctr"/>
@@ -6688,7 +6707,7 @@
           </a:fontRef>
         </p:style>
         <p:txBody>
-          <a:bodyPr rtlCol="0" anchor="ctr" wrap="square"/>
+          <a:bodyPr wrap="square" rtlCol="0" anchor="ctr"/>
           <a:lstStyle/>
           <a:p>
             <a:pPr algn="ctr"/>
@@ -6797,7 +6816,7 @@
 </file>
 
 <file path=ppt/slides/slide13.xml><?xml version="1.0" encoding="utf-8"?>
-<p:sld xmlns:a="http://schemas.openxmlformats.org/drawingml/2006/main" xmlns:p="http://schemas.openxmlformats.org/presentationml/2006/main" xmlns:r="http://schemas.openxmlformats.org/officeDocument/2006/relationships">
+<p:sld xmlns:a="http://schemas.openxmlformats.org/drawingml/2006/main" xmlns:r="http://schemas.openxmlformats.org/officeDocument/2006/relationships" xmlns:p="http://schemas.openxmlformats.org/presentationml/2006/main">
   <p:cSld>
     <p:spTree>
       <p:nvGrpSpPr>
@@ -6805,7 +6824,14 @@
         <p:cNvGrpSpPr/>
         <p:nvPr/>
       </p:nvGrpSpPr>
-      <p:grpSpPr/>
+      <p:grpSpPr>
+        <a:xfrm>
+          <a:off x="0" y="0"/>
+          <a:ext cx="0" cy="0"/>
+          <a:chOff x="0" y="0"/>
+          <a:chExt cx="0" cy="0"/>
+        </a:xfrm>
+      </p:grpSpPr>
       <p:sp>
         <p:nvSpPr>
           <p:cNvPr id="2" name="TextBox 1"/>
@@ -6882,6 +6908,7 @@
           <a:lstStyle/>
           <a:p>
             <a:pPr algn="ctr"/>
+            <a:endParaRPr/>
           </a:p>
         </p:txBody>
       </p:sp>
@@ -7177,7 +7204,7 @@
 </file>
 
 <file path=ppt/slides/slide14.xml><?xml version="1.0" encoding="utf-8"?>
-<p:sld xmlns:a="http://schemas.openxmlformats.org/drawingml/2006/main" xmlns:p="http://schemas.openxmlformats.org/presentationml/2006/main" xmlns:r="http://schemas.openxmlformats.org/officeDocument/2006/relationships">
+<p:sld xmlns:a="http://schemas.openxmlformats.org/drawingml/2006/main" xmlns:r="http://schemas.openxmlformats.org/officeDocument/2006/relationships" xmlns:p="http://schemas.openxmlformats.org/presentationml/2006/main">
   <p:cSld>
     <p:spTree>
       <p:nvGrpSpPr>
@@ -7185,7 +7212,14 @@
         <p:cNvGrpSpPr/>
         <p:nvPr/>
       </p:nvGrpSpPr>
-      <p:grpSpPr/>
+      <p:grpSpPr>
+        <a:xfrm>
+          <a:off x="0" y="0"/>
+          <a:ext cx="0" cy="0"/>
+          <a:chOff x="0" y="0"/>
+          <a:chExt cx="0" cy="0"/>
+        </a:xfrm>
+      </p:grpSpPr>
       <p:sp>
         <p:nvSpPr>
           <p:cNvPr id="2" name="TextBox 1"/>
@@ -7262,6 +7296,7 @@
           <a:lstStyle/>
           <a:p>
             <a:pPr algn="ctr"/>
+            <a:endParaRPr/>
           </a:p>
         </p:txBody>
       </p:sp>
@@ -7341,6 +7376,7 @@
           <a:lstStyle/>
           <a:p>
             <a:pPr algn="ctr"/>
+            <a:endParaRPr/>
           </a:p>
         </p:txBody>
       </p:sp>
@@ -7375,7 +7411,7 @@
               </a:defRPr>
             </a:pPr>
             <a:r>
-              <a:t>src/app.py</a:t>
+              <a:t>app.py</a:t>
             </a:r>
           </a:p>
         </p:txBody>
@@ -7456,6 +7492,7 @@
           <a:lstStyle/>
           <a:p>
             <a:pPr algn="ctr"/>
+            <a:endParaRPr/>
           </a:p>
         </p:txBody>
       </p:sp>
@@ -7490,7 +7527,7 @@
               </a:defRPr>
             </a:pPr>
             <a:r>
-              <a:t>src/state.py</a:t>
+              <a:t>state.py</a:t>
             </a:r>
           </a:p>
         </p:txBody>
@@ -7571,6 +7608,7 @@
           <a:lstStyle/>
           <a:p>
             <a:pPr algn="ctr"/>
+            <a:endParaRPr/>
           </a:p>
         </p:txBody>
       </p:sp>
@@ -7605,7 +7643,7 @@
               </a:defRPr>
             </a:pPr>
             <a:r>
-              <a:t>src/agents.py</a:t>
+              <a:t>agents.py</a:t>
             </a:r>
           </a:p>
         </p:txBody>
@@ -7686,6 +7724,7 @@
           <a:lstStyle/>
           <a:p>
             <a:pPr algn="ctr"/>
+            <a:endParaRPr/>
           </a:p>
         </p:txBody>
       </p:sp>
@@ -7720,7 +7759,7 @@
               </a:defRPr>
             </a:pPr>
             <a:r>
-              <a:t>src/graph.py</a:t>
+              <a:t>graph.py</a:t>
             </a:r>
           </a:p>
         </p:txBody>
@@ -7801,6 +7840,7 @@
           <a:lstStyle/>
           <a:p>
             <a:pPr algn="ctr"/>
+            <a:endParaRPr/>
           </a:p>
         </p:txBody>
       </p:sp>
@@ -7835,7 +7875,7 @@
               </a:defRPr>
             </a:pPr>
             <a:r>
-              <a:t>src/tools.py</a:t>
+              <a:t>tools.py</a:t>
             </a:r>
           </a:p>
         </p:txBody>
@@ -7916,6 +7956,7 @@
           <a:lstStyle/>
           <a:p>
             <a:pPr algn="ctr"/>
+            <a:endParaRPr/>
           </a:p>
         </p:txBody>
       </p:sp>
@@ -7950,7 +7991,7 @@
               </a:defRPr>
             </a:pPr>
             <a:r>
-              <a:t>src/watcher.py</a:t>
+              <a:t>watcher.py</a:t>
             </a:r>
           </a:p>
         </p:txBody>
@@ -8031,6 +8072,7 @@
           <a:lstStyle/>
           <a:p>
             <a:pPr algn="ctr"/>
+            <a:endParaRPr/>
           </a:p>
         </p:txBody>
       </p:sp>
@@ -8065,7 +8107,7 @@
               </a:defRPr>
             </a:pPr>
             <a:r>
-              <a:t>src/log_samples/</a:t>
+              <a:t>log_samples/</a:t>
             </a:r>
           </a:p>
         </p:txBody>
@@ -8146,6 +8188,7 @@
           <a:lstStyle/>
           <a:p>
             <a:pPr algn="ctr"/>
+            <a:endParaRPr/>
           </a:p>
         </p:txBody>
       </p:sp>
@@ -8180,7 +8223,7 @@
               </a:defRPr>
             </a:pPr>
             <a:r>
-              <a:t>tests/test_*.py</a:t>
+              <a:t>test_*.py</a:t>
             </a:r>
           </a:p>
         </p:txBody>
@@ -8230,7 +8273,7 @@
 </file>
 
 <file path=ppt/slides/slide15.xml><?xml version="1.0" encoding="utf-8"?>
-<p:sld xmlns:a="http://schemas.openxmlformats.org/drawingml/2006/main" xmlns:p="http://schemas.openxmlformats.org/presentationml/2006/main" xmlns:r="http://schemas.openxmlformats.org/officeDocument/2006/relationships">
+<p:sld xmlns:a="http://schemas.openxmlformats.org/drawingml/2006/main" xmlns:r="http://schemas.openxmlformats.org/officeDocument/2006/relationships" xmlns:p="http://schemas.openxmlformats.org/presentationml/2006/main">
   <p:cSld>
     <p:spTree>
       <p:nvGrpSpPr>
@@ -8238,7 +8281,14 @@
         <p:cNvGrpSpPr/>
         <p:nvPr/>
       </p:nvGrpSpPr>
-      <p:grpSpPr/>
+      <p:grpSpPr>
+        <a:xfrm>
+          <a:off x="0" y="0"/>
+          <a:ext cx="0" cy="0"/>
+          <a:chOff x="0" y="0"/>
+          <a:chExt cx="0" cy="0"/>
+        </a:xfrm>
+      </p:grpSpPr>
       <p:sp>
         <p:nvSpPr>
           <p:cNvPr id="2" name="TextBox 1"/>
@@ -8315,6 +8365,7 @@
           <a:lstStyle/>
           <a:p>
             <a:pPr algn="ctr"/>
+            <a:endParaRPr/>
           </a:p>
         </p:txBody>
       </p:sp>
@@ -8462,7 +8513,7 @@
 </file>
 
 <file path=ppt/slides/slide16.xml><?xml version="1.0" encoding="utf-8"?>
-<p:sld xmlns:a="http://schemas.openxmlformats.org/drawingml/2006/main" xmlns:p="http://schemas.openxmlformats.org/presentationml/2006/main" xmlns:r="http://schemas.openxmlformats.org/officeDocument/2006/relationships">
+<p:sld xmlns:a="http://schemas.openxmlformats.org/drawingml/2006/main" xmlns:r="http://schemas.openxmlformats.org/officeDocument/2006/relationships" xmlns:p="http://schemas.openxmlformats.org/presentationml/2006/main">
   <p:cSld>
     <p:bg>
       <p:bgPr>
@@ -8478,7 +8529,14 @@
         <p:cNvGrpSpPr/>
         <p:nvPr/>
       </p:nvGrpSpPr>
-      <p:grpSpPr/>
+      <p:grpSpPr>
+        <a:xfrm>
+          <a:off x="0" y="0"/>
+          <a:ext cx="0" cy="0"/>
+          <a:chOff x="0" y="0"/>
+          <a:chExt cx="0" cy="0"/>
+        </a:xfrm>
+      </p:grpSpPr>
       <p:sp>
         <p:nvSpPr>
           <p:cNvPr id="2" name="TextBox 1"/>
@@ -8591,6 +8649,7 @@
           <a:lstStyle/>
           <a:p>
             <a:pPr algn="ctr"/>
+            <a:endParaRPr/>
           </a:p>
         </p:txBody>
       </p:sp>
@@ -8675,7 +8734,7 @@
 </file>
 
 <file path=ppt/slides/slide2.xml><?xml version="1.0" encoding="utf-8"?>
-<p:sld xmlns:a="http://schemas.openxmlformats.org/drawingml/2006/main" xmlns:p="http://schemas.openxmlformats.org/presentationml/2006/main" xmlns:r="http://schemas.openxmlformats.org/officeDocument/2006/relationships">
+<p:sld xmlns:a="http://schemas.openxmlformats.org/drawingml/2006/main" xmlns:r="http://schemas.openxmlformats.org/officeDocument/2006/relationships" xmlns:p="http://schemas.openxmlformats.org/presentationml/2006/main">
   <p:cSld>
     <p:spTree>
       <p:nvGrpSpPr>
@@ -8683,7 +8742,14 @@
         <p:cNvGrpSpPr/>
         <p:nvPr/>
       </p:nvGrpSpPr>
-      <p:grpSpPr/>
+      <p:grpSpPr>
+        <a:xfrm>
+          <a:off x="0" y="0"/>
+          <a:ext cx="0" cy="0"/>
+          <a:chOff x="0" y="0"/>
+          <a:chExt cx="0" cy="0"/>
+        </a:xfrm>
+      </p:grpSpPr>
       <p:sp>
         <p:nvSpPr>
           <p:cNvPr id="2" name="TextBox 1"/>
@@ -8760,6 +8826,7 @@
           <a:lstStyle/>
           <a:p>
             <a:pPr algn="ctr"/>
+            <a:endParaRPr/>
           </a:p>
         </p:txBody>
       </p:sp>
@@ -8955,7 +9022,7 @@
 </file>
 
 <file path=ppt/slides/slide3.xml><?xml version="1.0" encoding="utf-8"?>
-<p:sld xmlns:a="http://schemas.openxmlformats.org/drawingml/2006/main" xmlns:p="http://schemas.openxmlformats.org/presentationml/2006/main" xmlns:r="http://schemas.openxmlformats.org/officeDocument/2006/relationships">
+<p:sld xmlns:a="http://schemas.openxmlformats.org/drawingml/2006/main" xmlns:r="http://schemas.openxmlformats.org/officeDocument/2006/relationships" xmlns:p="http://schemas.openxmlformats.org/presentationml/2006/main">
   <p:cSld>
     <p:spTree>
       <p:nvGrpSpPr>
@@ -8963,7 +9030,14 @@
         <p:cNvGrpSpPr/>
         <p:nvPr/>
       </p:nvGrpSpPr>
-      <p:grpSpPr/>
+      <p:grpSpPr>
+        <a:xfrm>
+          <a:off x="0" y="0"/>
+          <a:ext cx="0" cy="0"/>
+          <a:chOff x="0" y="0"/>
+          <a:chExt cx="0" cy="0"/>
+        </a:xfrm>
+      </p:grpSpPr>
       <p:sp>
         <p:nvSpPr>
           <p:cNvPr id="2" name="TextBox 1"/>
@@ -9040,6 +9114,7 @@
           <a:lstStyle/>
           <a:p>
             <a:pPr algn="ctr"/>
+            <a:endParaRPr/>
           </a:p>
         </p:txBody>
       </p:sp>
@@ -9239,7 +9314,7 @@
 </file>
 
 <file path=ppt/slides/slide4.xml><?xml version="1.0" encoding="utf-8"?>
-<p:sld xmlns:a="http://schemas.openxmlformats.org/drawingml/2006/main" xmlns:p="http://schemas.openxmlformats.org/presentationml/2006/main" xmlns:r="http://schemas.openxmlformats.org/officeDocument/2006/relationships">
+<p:sld xmlns:a="http://schemas.openxmlformats.org/drawingml/2006/main" xmlns:r="http://schemas.openxmlformats.org/officeDocument/2006/relationships" xmlns:p="http://schemas.openxmlformats.org/presentationml/2006/main">
   <p:cSld>
     <p:spTree>
       <p:nvGrpSpPr>
@@ -9247,7 +9322,14 @@
         <p:cNvGrpSpPr/>
         <p:nvPr/>
       </p:nvGrpSpPr>
-      <p:grpSpPr/>
+      <p:grpSpPr>
+        <a:xfrm>
+          <a:off x="0" y="0"/>
+          <a:ext cx="0" cy="0"/>
+          <a:chOff x="0" y="0"/>
+          <a:chExt cx="0" cy="0"/>
+        </a:xfrm>
+      </p:grpSpPr>
       <p:sp>
         <p:nvSpPr>
           <p:cNvPr id="2" name="TextBox 1"/>
@@ -9324,6 +9406,7 @@
           <a:lstStyle/>
           <a:p>
             <a:pPr algn="ctr"/>
+            <a:endParaRPr/>
           </a:p>
         </p:txBody>
       </p:sp>
@@ -9396,7 +9479,7 @@
 </file>
 
 <file path=ppt/slides/slide5.xml><?xml version="1.0" encoding="utf-8"?>
-<p:sld xmlns:a="http://schemas.openxmlformats.org/drawingml/2006/main" xmlns:p="http://schemas.openxmlformats.org/presentationml/2006/main" xmlns:r="http://schemas.openxmlformats.org/officeDocument/2006/relationships">
+<p:sld xmlns:a="http://schemas.openxmlformats.org/drawingml/2006/main" xmlns:r="http://schemas.openxmlformats.org/officeDocument/2006/relationships" xmlns:p="http://schemas.openxmlformats.org/presentationml/2006/main">
   <p:cSld>
     <p:spTree>
       <p:nvGrpSpPr>
@@ -9404,7 +9487,14 @@
         <p:cNvGrpSpPr/>
         <p:nvPr/>
       </p:nvGrpSpPr>
-      <p:grpSpPr/>
+      <p:grpSpPr>
+        <a:xfrm>
+          <a:off x="0" y="0"/>
+          <a:ext cx="0" cy="0"/>
+          <a:chOff x="0" y="0"/>
+          <a:chExt cx="0" cy="0"/>
+        </a:xfrm>
+      </p:grpSpPr>
       <p:sp>
         <p:nvSpPr>
           <p:cNvPr id="2" name="TextBox 1"/>
@@ -9481,6 +9571,7 @@
           <a:lstStyle/>
           <a:p>
             <a:pPr algn="ctr"/>
+            <a:endParaRPr/>
           </a:p>
         </p:txBody>
       </p:sp>
@@ -9557,7 +9648,7 @@
           </a:fontRef>
         </p:style>
         <p:txBody>
-          <a:bodyPr rtlCol="0" anchor="ctr" wrap="square"/>
+          <a:bodyPr wrap="square" rtlCol="0" anchor="ctr"/>
           <a:lstStyle/>
           <a:p>
             <a:pPr algn="ctr"/>
@@ -9610,7 +9701,7 @@
           </a:fontRef>
         </p:style>
         <p:txBody>
-          <a:bodyPr rtlCol="0" anchor="ctr" wrap="square"/>
+          <a:bodyPr wrap="square" rtlCol="0" anchor="ctr"/>
           <a:lstStyle/>
           <a:p>
             <a:pPr algn="ctr"/>
@@ -9663,7 +9754,7 @@
           </a:fontRef>
         </p:style>
         <p:txBody>
-          <a:bodyPr rtlCol="0" anchor="ctr" wrap="square"/>
+          <a:bodyPr wrap="square" rtlCol="0" anchor="ctr"/>
           <a:lstStyle/>
           <a:p>
             <a:pPr algn="ctr"/>
@@ -9687,7 +9778,7 @@
         </p:nvSpPr>
         <p:spPr>
           <a:xfrm>
-            <a:off x="3931920" y="2697480"/>
+            <a:off x="3252499" y="2684457"/>
             <a:ext cx="1371600" cy="274320"/>
           </a:xfrm>
           <a:prstGeom prst="rect">
@@ -9710,7 +9801,12 @@
               </a:defRPr>
             </a:pPr>
             <a:r>
-              <a:t>has_critical?</a:t>
+              <a:rPr dirty="0" err="1"/>
+              <a:t>has_critical</a:t>
+            </a:r>
+            <a:r>
+              <a:rPr dirty="0"/>
+              <a:t>?</a:t>
             </a:r>
           </a:p>
         </p:txBody>
@@ -9723,7 +9819,7 @@
         </p:nvSpPr>
         <p:spPr>
           <a:xfrm>
-            <a:off x="1828800" y="3200400"/>
+            <a:off x="1286539" y="4489705"/>
             <a:ext cx="1463040" cy="640080"/>
           </a:xfrm>
           <a:prstGeom prst="roundRect">
@@ -9752,12 +9848,12 @@
           </a:fontRef>
         </p:style>
         <p:txBody>
-          <a:bodyPr rtlCol="0" anchor="ctr" wrap="square"/>
+          <a:bodyPr wrap="square" rtlCol="0" anchor="ctr"/>
           <a:lstStyle/>
           <a:p>
             <a:pPr algn="ctr"/>
             <a:r>
-              <a:rPr sz="1400" b="1">
+              <a:rPr sz="1400" b="1" dirty="0">
                 <a:solidFill>
                   <a:srgbClr val="2D3436"/>
                 </a:solidFill>
@@ -9776,7 +9872,7 @@
         </p:nvSpPr>
         <p:spPr>
           <a:xfrm>
-            <a:off x="3566160" y="3200400"/>
+            <a:off x="3023899" y="4489705"/>
             <a:ext cx="1463040" cy="640080"/>
           </a:xfrm>
           <a:prstGeom prst="roundRect">
@@ -9805,7 +9901,7 @@
           </a:fontRef>
         </p:style>
         <p:txBody>
-          <a:bodyPr rtlCol="0" anchor="ctr" wrap="square"/>
+          <a:bodyPr wrap="square" rtlCol="0" anchor="ctr"/>
           <a:lstStyle/>
           <a:p>
             <a:pPr algn="ctr"/>
@@ -9829,7 +9925,7 @@
         </p:nvSpPr>
         <p:spPr>
           <a:xfrm>
-            <a:off x="5303520" y="3200400"/>
+            <a:off x="4761259" y="4489705"/>
             <a:ext cx="1463040" cy="640080"/>
           </a:xfrm>
           <a:prstGeom prst="roundRect">
@@ -9858,7 +9954,7 @@
           </a:fontRef>
         </p:style>
         <p:txBody>
-          <a:bodyPr rtlCol="0" anchor="ctr" wrap="square"/>
+          <a:bodyPr wrap="square" rtlCol="0" anchor="ctr"/>
           <a:lstStyle/>
           <a:p>
             <a:pPr algn="ctr"/>
@@ -9882,8 +9978,8 @@
         </p:nvSpPr>
         <p:spPr>
           <a:xfrm>
-            <a:off x="5394960" y="2286000"/>
-            <a:ext cx="1828800" cy="274320"/>
+            <a:off x="4753869" y="2743200"/>
+            <a:ext cx="1104671" cy="261610"/>
           </a:xfrm>
           <a:prstGeom prst="rect">
             <a:avLst/>
@@ -9905,27 +10001,28 @@
               </a:defRPr>
             </a:pPr>
             <a:r>
-              <a:t>no critical →</a:t>
-            </a:r>
-          </a:p>
-        </p:txBody>
-      </p:sp>
-      <p:sp>
-        <p:nvSpPr>
-          <p:cNvPr id="13" name="Rounded Rectangle 12"/>
+              <a:rPr dirty="0"/>
+              <a:t>no critical</a:t>
+            </a:r>
+          </a:p>
+        </p:txBody>
+      </p:sp>
+      <p:sp>
+        <p:nvSpPr>
+          <p:cNvPr id="14" name="Rounded Rectangle 13"/>
           <p:cNvSpPr/>
           <p:nvPr/>
         </p:nvSpPr>
         <p:spPr>
           <a:xfrm>
-            <a:off x="6858000" y="2011680"/>
-            <a:ext cx="1463040" cy="640080"/>
+            <a:off x="6498619" y="4489705"/>
+            <a:ext cx="914400" cy="640080"/>
           </a:xfrm>
           <a:prstGeom prst="roundRect">
             <a:avLst/>
           </a:prstGeom>
           <a:solidFill>
-            <a:srgbClr val="EC4899"/>
+            <a:srgbClr val="1A1A2E"/>
           </a:solidFill>
           <a:ln>
             <a:noFill/>
@@ -9947,43 +10044,42 @@
           </a:fontRef>
         </p:style>
         <p:txBody>
-          <a:bodyPr rtlCol="0" anchor="ctr" wrap="square"/>
+          <a:bodyPr wrap="square" rtlCol="0" anchor="ctr"/>
           <a:lstStyle/>
           <a:p>
             <a:pPr algn="ctr"/>
             <a:r>
-              <a:rPr sz="1400" b="1">
+              <a:rPr sz="1200" b="1">
                 <a:solidFill>
                   <a:srgbClr val="FFFFFF"/>
                 </a:solidFill>
                 <a:latin typeface="Calibri"/>
               </a:rPr>
-              <a:t>Cookbook</a:t>
-            </a:r>
-          </a:p>
-        </p:txBody>
-      </p:sp>
-      <p:sp>
-        <p:nvSpPr>
-          <p:cNvPr id="14" name="Rounded Rectangle 13"/>
+              <a:t>END</a:t>
+            </a:r>
+          </a:p>
+        </p:txBody>
+      </p:sp>
+      <p:sp>
+        <p:nvSpPr>
+          <p:cNvPr id="16" name="Rectangle 15"/>
           <p:cNvSpPr/>
           <p:nvPr/>
         </p:nvSpPr>
         <p:spPr>
           <a:xfrm>
-            <a:off x="7040880" y="3200400"/>
-            <a:ext cx="914400" cy="640080"/>
-          </a:xfrm>
-          <a:prstGeom prst="roundRect">
-            <a:avLst/>
-          </a:prstGeom>
-          <a:solidFill>
-            <a:srgbClr val="1A1A2E"/>
+            <a:off x="1920240" y="2331720"/>
+            <a:ext cx="182880" cy="36576"/>
+          </a:xfrm>
+          <a:prstGeom prst="rect">
+            <a:avLst/>
+          </a:prstGeom>
+          <a:solidFill>
+            <a:srgbClr val="888888"/>
           </a:solidFill>
           <a:ln>
             <a:noFill/>
           </a:ln>
-          <a:effectLst/>
         </p:spPr>
         <p:style>
           <a:lnRef idx="1">
@@ -10000,43 +10096,34 @@
           </a:fontRef>
         </p:style>
         <p:txBody>
-          <a:bodyPr rtlCol="0" anchor="ctr" wrap="square"/>
+          <a:bodyPr rtlCol="0" anchor="ctr"/>
           <a:lstStyle/>
           <a:p>
             <a:pPr algn="ctr"/>
-            <a:r>
-              <a:rPr sz="1200" b="1">
-                <a:solidFill>
-                  <a:srgbClr val="FFFFFF"/>
-                </a:solidFill>
-                <a:latin typeface="Calibri"/>
-              </a:rPr>
-              <a:t>END</a:t>
-            </a:r>
-          </a:p>
-        </p:txBody>
-      </p:sp>
-      <p:sp>
-        <p:nvSpPr>
-          <p:cNvPr id="15" name="Rounded Rectangle 14"/>
+            <a:endParaRPr/>
+          </a:p>
+        </p:txBody>
+      </p:sp>
+      <p:sp>
+        <p:nvSpPr>
+          <p:cNvPr id="17" name="Rectangle 16"/>
           <p:cNvSpPr/>
           <p:nvPr/>
         </p:nvSpPr>
         <p:spPr>
           <a:xfrm>
-            <a:off x="6858000" y="2743200"/>
-            <a:ext cx="914400" cy="457200"/>
-          </a:xfrm>
-          <a:prstGeom prst="roundRect">
-            <a:avLst/>
-          </a:prstGeom>
-          <a:solidFill>
-            <a:srgbClr val="1A1A2E"/>
+            <a:off x="3566160" y="2331720"/>
+            <a:ext cx="182879" cy="36576"/>
+          </a:xfrm>
+          <a:prstGeom prst="rect">
+            <a:avLst/>
+          </a:prstGeom>
+          <a:solidFill>
+            <a:srgbClr val="888888"/>
           </a:solidFill>
           <a:ln>
             <a:noFill/>
           </a:ln>
-          <a:effectLst/>
         </p:spPr>
         <p:style>
           <a:lnRef idx="1">
@@ -10053,32 +10140,24 @@
           </a:fontRef>
         </p:style>
         <p:txBody>
-          <a:bodyPr rtlCol="0" anchor="ctr" wrap="square"/>
+          <a:bodyPr rtlCol="0" anchor="ctr"/>
           <a:lstStyle/>
           <a:p>
             <a:pPr algn="ctr"/>
-            <a:r>
-              <a:rPr sz="1200" b="1">
-                <a:solidFill>
-                  <a:srgbClr val="FFFFFF"/>
-                </a:solidFill>
-                <a:latin typeface="Calibri"/>
-              </a:rPr>
-              <a:t>END</a:t>
-            </a:r>
-          </a:p>
-        </p:txBody>
-      </p:sp>
-      <p:sp>
-        <p:nvSpPr>
-          <p:cNvPr id="16" name="Rectangle 15"/>
+            <a:endParaRPr/>
+          </a:p>
+        </p:txBody>
+      </p:sp>
+      <p:sp>
+        <p:nvSpPr>
+          <p:cNvPr id="18" name="Rectangle 17"/>
           <p:cNvSpPr/>
           <p:nvPr/>
         </p:nvSpPr>
         <p:spPr>
           <a:xfrm>
-            <a:off x="1920240" y="2331720"/>
-            <a:ext cx="182880" cy="36576"/>
+            <a:off x="2749579" y="4809745"/>
+            <a:ext cx="274320" cy="36576"/>
           </a:xfrm>
           <a:prstGeom prst="rect">
             <a:avLst/>
@@ -10109,19 +10188,20 @@
           <a:lstStyle/>
           <a:p>
             <a:pPr algn="ctr"/>
-          </a:p>
-        </p:txBody>
-      </p:sp>
-      <p:sp>
-        <p:nvSpPr>
-          <p:cNvPr id="17" name="Rectangle 16"/>
+            <a:endParaRPr/>
+          </a:p>
+        </p:txBody>
+      </p:sp>
+      <p:sp>
+        <p:nvSpPr>
+          <p:cNvPr id="19" name="Rectangle 18"/>
           <p:cNvSpPr/>
           <p:nvPr/>
         </p:nvSpPr>
         <p:spPr>
           <a:xfrm>
-            <a:off x="3566160" y="2331720"/>
-            <a:ext cx="182879" cy="36576"/>
+            <a:off x="4486939" y="4809745"/>
+            <a:ext cx="274320" cy="36576"/>
           </a:xfrm>
           <a:prstGeom prst="rect">
             <a:avLst/>
@@ -10152,18 +10232,19 @@
           <a:lstStyle/>
           <a:p>
             <a:pPr algn="ctr"/>
-          </a:p>
-        </p:txBody>
-      </p:sp>
-      <p:sp>
-        <p:nvSpPr>
-          <p:cNvPr id="18" name="Rectangle 17"/>
+            <a:endParaRPr/>
+          </a:p>
+        </p:txBody>
+      </p:sp>
+      <p:sp>
+        <p:nvSpPr>
+          <p:cNvPr id="20" name="Rectangle 19"/>
           <p:cNvSpPr/>
           <p:nvPr/>
         </p:nvSpPr>
         <p:spPr>
           <a:xfrm>
-            <a:off x="3291840" y="3520440"/>
+            <a:off x="6224299" y="4809745"/>
             <a:ext cx="274320" cy="36576"/>
           </a:xfrm>
           <a:prstGeom prst="rect">
@@ -10195,19 +10276,26 @@
           <a:lstStyle/>
           <a:p>
             <a:pPr algn="ctr"/>
-          </a:p>
-        </p:txBody>
-      </p:sp>
-      <p:sp>
-        <p:nvSpPr>
-          <p:cNvPr id="19" name="Rectangle 18"/>
+            <a:endParaRPr/>
+          </a:p>
+        </p:txBody>
+      </p:sp>
+      <p:sp>
+        <p:nvSpPr>
+          <p:cNvPr id="21" name="Rectangle 20">
+            <a:extLst>
+              <a:ext uri="{FF2B5EF4-FFF2-40B4-BE49-F238E27FC236}">
+                <a16:creationId xmlns:a16="http://schemas.microsoft.com/office/drawing/2014/main" id="{18809822-9A69-B072-5866-89F3529FD541}"/>
+              </a:ext>
+            </a:extLst>
+          </p:cNvPr>
           <p:cNvSpPr/>
           <p:nvPr/>
         </p:nvSpPr>
         <p:spPr>
-          <a:xfrm>
-            <a:off x="5029200" y="3520440"/>
-            <a:ext cx="274320" cy="36576"/>
+          <a:xfrm rot="8531834">
+            <a:off x="1712051" y="3755425"/>
+            <a:ext cx="2348363" cy="57144"/>
           </a:xfrm>
           <a:prstGeom prst="rect">
             <a:avLst/>
@@ -10238,19 +10326,30 @@
           <a:lstStyle/>
           <a:p>
             <a:pPr algn="ctr"/>
-          </a:p>
-        </p:txBody>
-      </p:sp>
-      <p:sp>
-        <p:nvSpPr>
-          <p:cNvPr id="20" name="Rectangle 19"/>
+            <a:endParaRPr dirty="0">
+              <a:solidFill>
+                <a:srgbClr val="FF0000"/>
+              </a:solidFill>
+            </a:endParaRPr>
+          </a:p>
+        </p:txBody>
+      </p:sp>
+      <p:sp>
+        <p:nvSpPr>
+          <p:cNvPr id="22" name="Rectangle 21">
+            <a:extLst>
+              <a:ext uri="{FF2B5EF4-FFF2-40B4-BE49-F238E27FC236}">
+                <a16:creationId xmlns:a16="http://schemas.microsoft.com/office/drawing/2014/main" id="{AF69D653-A872-343B-D242-33674FE7DD42}"/>
+              </a:ext>
+            </a:extLst>
+          </p:cNvPr>
           <p:cNvSpPr/>
           <p:nvPr/>
         </p:nvSpPr>
         <p:spPr>
-          <a:xfrm>
-            <a:off x="6766560" y="3520440"/>
-            <a:ext cx="274320" cy="36576"/>
+          <a:xfrm rot="4146681" flipV="1">
+            <a:off x="4336224" y="3730754"/>
+            <a:ext cx="1645920" cy="45719"/>
           </a:xfrm>
           <a:prstGeom prst="rect">
             <a:avLst/>
@@ -10281,6 +10380,7 @@
           <a:lstStyle/>
           <a:p>
             <a:pPr algn="ctr"/>
+            <a:endParaRPr/>
           </a:p>
         </p:txBody>
       </p:sp>
@@ -10293,7 +10393,7 @@
 </file>
 
 <file path=ppt/slides/slide6.xml><?xml version="1.0" encoding="utf-8"?>
-<p:sld xmlns:a="http://schemas.openxmlformats.org/drawingml/2006/main" xmlns:p="http://schemas.openxmlformats.org/presentationml/2006/main" xmlns:r="http://schemas.openxmlformats.org/officeDocument/2006/relationships">
+<p:sld xmlns:a="http://schemas.openxmlformats.org/drawingml/2006/main" xmlns:r="http://schemas.openxmlformats.org/officeDocument/2006/relationships" xmlns:p="http://schemas.openxmlformats.org/presentationml/2006/main">
   <p:cSld>
     <p:spTree>
       <p:nvGrpSpPr>
@@ -10301,7 +10401,14 @@
         <p:cNvGrpSpPr/>
         <p:nvPr/>
       </p:nvGrpSpPr>
-      <p:grpSpPr/>
+      <p:grpSpPr>
+        <a:xfrm>
+          <a:off x="0" y="0"/>
+          <a:ext cx="0" cy="0"/>
+          <a:chOff x="0" y="0"/>
+          <a:chExt cx="0" cy="0"/>
+        </a:xfrm>
+      </p:grpSpPr>
       <p:sp>
         <p:nvSpPr>
           <p:cNvPr id="2" name="TextBox 1"/>
@@ -10378,6 +10485,7 @@
           <a:lstStyle/>
           <a:p>
             <a:pPr algn="ctr"/>
+            <a:endParaRPr/>
           </a:p>
         </p:txBody>
       </p:sp>
@@ -10418,7 +10526,7 @@
           </a:fontRef>
         </p:style>
         <p:txBody>
-          <a:bodyPr rtlCol="0" anchor="ctr" wrap="square"/>
+          <a:bodyPr wrap="square" rtlCol="0" anchor="ctr"/>
           <a:lstStyle/>
           <a:p>
             <a:pPr algn="ctr"/>
@@ -10507,7 +10615,7 @@
           </a:fontRef>
         </p:style>
         <p:txBody>
-          <a:bodyPr rtlCol="0" anchor="ctr" wrap="square"/>
+          <a:bodyPr wrap="square" rtlCol="0" anchor="ctr"/>
           <a:lstStyle/>
           <a:p>
             <a:pPr algn="ctr"/>
@@ -10596,7 +10704,7 @@
           </a:fontRef>
         </p:style>
         <p:txBody>
-          <a:bodyPr rtlCol="0" anchor="ctr" wrap="square"/>
+          <a:bodyPr wrap="square" rtlCol="0" anchor="ctr"/>
           <a:lstStyle/>
           <a:p>
             <a:pPr algn="ctr"/>
@@ -10685,7 +10793,7 @@
           </a:fontRef>
         </p:style>
         <p:txBody>
-          <a:bodyPr rtlCol="0" anchor="ctr" wrap="square"/>
+          <a:bodyPr wrap="square" rtlCol="0" anchor="ctr"/>
           <a:lstStyle/>
           <a:p>
             <a:pPr algn="ctr"/>
@@ -10774,7 +10882,7 @@
           </a:fontRef>
         </p:style>
         <p:txBody>
-          <a:bodyPr rtlCol="0" anchor="ctr" wrap="square"/>
+          <a:bodyPr wrap="square" rtlCol="0" anchor="ctr"/>
           <a:lstStyle/>
           <a:p>
             <a:pPr algn="ctr"/>
@@ -10863,7 +10971,7 @@
           </a:fontRef>
         </p:style>
         <p:txBody>
-          <a:bodyPr rtlCol="0" anchor="ctr" wrap="square"/>
+          <a:bodyPr wrap="square" rtlCol="0" anchor="ctr"/>
           <a:lstStyle/>
           <a:p>
             <a:pPr algn="ctr"/>
@@ -10952,7 +11060,7 @@
           </a:fontRef>
         </p:style>
         <p:txBody>
-          <a:bodyPr rtlCol="0" anchor="ctr" wrap="square"/>
+          <a:bodyPr wrap="square" rtlCol="0" anchor="ctr"/>
           <a:lstStyle/>
           <a:p>
             <a:pPr algn="ctr"/>
@@ -11013,7 +11121,7 @@
 </file>
 
 <file path=ppt/slides/slide7.xml><?xml version="1.0" encoding="utf-8"?>
-<p:sld xmlns:a="http://schemas.openxmlformats.org/drawingml/2006/main" xmlns:p="http://schemas.openxmlformats.org/presentationml/2006/main" xmlns:r="http://schemas.openxmlformats.org/officeDocument/2006/relationships">
+<p:sld xmlns:a="http://schemas.openxmlformats.org/drawingml/2006/main" xmlns:r="http://schemas.openxmlformats.org/officeDocument/2006/relationships" xmlns:p="http://schemas.openxmlformats.org/presentationml/2006/main">
   <p:cSld>
     <p:spTree>
       <p:nvGrpSpPr>
@@ -11021,7 +11129,14 @@
         <p:cNvGrpSpPr/>
         <p:nvPr/>
       </p:nvGrpSpPr>
-      <p:grpSpPr/>
+      <p:grpSpPr>
+        <a:xfrm>
+          <a:off x="0" y="0"/>
+          <a:ext cx="0" cy="0"/>
+          <a:chOff x="0" y="0"/>
+          <a:chExt cx="0" cy="0"/>
+        </a:xfrm>
+      </p:grpSpPr>
       <p:sp>
         <p:nvSpPr>
           <p:cNvPr id="2" name="TextBox 1"/>
@@ -11098,6 +11213,7 @@
           <a:lstStyle/>
           <a:p>
             <a:pPr algn="ctr"/>
+            <a:endParaRPr/>
           </a:p>
         </p:txBody>
       </p:sp>
@@ -11174,7 +11290,7 @@
           </a:fontRef>
         </p:style>
         <p:txBody>
-          <a:bodyPr rtlCol="0" anchor="ctr" wrap="square"/>
+          <a:bodyPr wrap="square" rtlCol="0" anchor="ctr"/>
           <a:lstStyle/>
           <a:p>
             <a:pPr algn="ctr"/>
@@ -11275,7 +11391,7 @@
           </a:fontRef>
         </p:style>
         <p:txBody>
-          <a:bodyPr rtlCol="0" anchor="ctr" wrap="square"/>
+          <a:bodyPr wrap="square" rtlCol="0" anchor="ctr"/>
           <a:lstStyle/>
           <a:p>
             <a:pPr algn="ctr"/>
@@ -11376,7 +11492,7 @@
           </a:fontRef>
         </p:style>
         <p:txBody>
-          <a:bodyPr rtlCol="0" anchor="ctr" wrap="square"/>
+          <a:bodyPr wrap="square" rtlCol="0" anchor="ctr"/>
           <a:lstStyle/>
           <a:p>
             <a:pPr algn="ctr"/>
@@ -11477,7 +11593,7 @@
           </a:fontRef>
         </p:style>
         <p:txBody>
-          <a:bodyPr rtlCol="0" anchor="ctr" wrap="square"/>
+          <a:bodyPr wrap="square" rtlCol="0" anchor="ctr"/>
           <a:lstStyle/>
           <a:p>
             <a:pPr algn="ctr"/>
@@ -11578,7 +11694,7 @@
           </a:fontRef>
         </p:style>
         <p:txBody>
-          <a:bodyPr rtlCol="0" anchor="ctr" wrap="square"/>
+          <a:bodyPr wrap="square" rtlCol="0" anchor="ctr"/>
           <a:lstStyle/>
           <a:p>
             <a:pPr algn="ctr"/>
@@ -11651,7 +11767,7 @@
 </file>
 
 <file path=ppt/slides/slide8.xml><?xml version="1.0" encoding="utf-8"?>
-<p:sld xmlns:a="http://schemas.openxmlformats.org/drawingml/2006/main" xmlns:p="http://schemas.openxmlformats.org/presentationml/2006/main" xmlns:r="http://schemas.openxmlformats.org/officeDocument/2006/relationships">
+<p:sld xmlns:a="http://schemas.openxmlformats.org/drawingml/2006/main" xmlns:r="http://schemas.openxmlformats.org/officeDocument/2006/relationships" xmlns:p="http://schemas.openxmlformats.org/presentationml/2006/main">
   <p:cSld>
     <p:spTree>
       <p:nvGrpSpPr>
@@ -11659,7 +11775,14 @@
         <p:cNvGrpSpPr/>
         <p:nvPr/>
       </p:nvGrpSpPr>
-      <p:grpSpPr/>
+      <p:grpSpPr>
+        <a:xfrm>
+          <a:off x="0" y="0"/>
+          <a:ext cx="0" cy="0"/>
+          <a:chOff x="0" y="0"/>
+          <a:chExt cx="0" cy="0"/>
+        </a:xfrm>
+      </p:grpSpPr>
       <p:sp>
         <p:nvSpPr>
           <p:cNvPr id="2" name="TextBox 1"/>
@@ -11736,6 +11859,7 @@
           <a:lstStyle/>
           <a:p>
             <a:pPr algn="ctr"/>
+            <a:endParaRPr/>
           </a:p>
         </p:txBody>
       </p:sp>
@@ -11812,7 +11936,7 @@
           </a:fontRef>
         </p:style>
         <p:txBody>
-          <a:bodyPr rtlCol="0" anchor="ctr" wrap="square"/>
+          <a:bodyPr wrap="square" rtlCol="0" anchor="ctr"/>
           <a:lstStyle/>
           <a:p>
             <a:pPr algn="ctr"/>
@@ -11949,7 +12073,7 @@
           </a:fontRef>
         </p:style>
         <p:txBody>
-          <a:bodyPr rtlCol="0" anchor="ctr" wrap="square"/>
+          <a:bodyPr wrap="square" rtlCol="0" anchor="ctr"/>
           <a:lstStyle/>
           <a:p>
             <a:pPr algn="ctr"/>
@@ -12086,7 +12210,7 @@
           </a:fontRef>
         </p:style>
         <p:txBody>
-          <a:bodyPr rtlCol="0" anchor="ctr" wrap="square"/>
+          <a:bodyPr wrap="square" rtlCol="0" anchor="ctr"/>
           <a:lstStyle/>
           <a:p>
             <a:pPr algn="ctr"/>
@@ -12195,7 +12319,7 @@
 </file>
 
 <file path=ppt/slides/slide9.xml><?xml version="1.0" encoding="utf-8"?>
-<p:sld xmlns:a="http://schemas.openxmlformats.org/drawingml/2006/main" xmlns:p="http://schemas.openxmlformats.org/presentationml/2006/main" xmlns:r="http://schemas.openxmlformats.org/officeDocument/2006/relationships">
+<p:sld xmlns:a="http://schemas.openxmlformats.org/drawingml/2006/main" xmlns:r="http://schemas.openxmlformats.org/officeDocument/2006/relationships" xmlns:p="http://schemas.openxmlformats.org/presentationml/2006/main">
   <p:cSld>
     <p:spTree>
       <p:nvGrpSpPr>
@@ -12203,7 +12327,14 @@
         <p:cNvGrpSpPr/>
         <p:nvPr/>
       </p:nvGrpSpPr>
-      <p:grpSpPr/>
+      <p:grpSpPr>
+        <a:xfrm>
+          <a:off x="0" y="0"/>
+          <a:ext cx="0" cy="0"/>
+          <a:chOff x="0" y="0"/>
+          <a:chExt cx="0" cy="0"/>
+        </a:xfrm>
+      </p:grpSpPr>
       <p:sp>
         <p:nvSpPr>
           <p:cNvPr id="2" name="TextBox 1"/>
@@ -12280,6 +12411,7 @@
           <a:lstStyle/>
           <a:p>
             <a:pPr algn="ctr"/>
+            <a:endParaRPr/>
           </a:p>
         </p:txBody>
       </p:sp>
